--- a/SOCWatch-Presentation-Draft.pptx
+++ b/SOCWatch-Presentation-Draft.pptx
@@ -2130,7 +2130,7 @@
                 <a:ea typeface="Calibri" pitchFamily="34" charset="-122"/>
                 <a:cs typeface="Calibri" pitchFamily="34" charset="-120"/>
               </a:rPr>
-              <a:t>Student Number: CCA5008</a:t>
+              <a:t>Student Number: REDACTED</a:t>
             </a:r>
             <a:endParaRPr lang="en-US" sz="1400" dirty="0"/>
           </a:p>
@@ -3624,7 +3624,7 @@
                 <a:ea typeface="Calibri" pitchFamily="34" charset="-122"/>
                 <a:cs typeface="Calibri" pitchFamily="34" charset="-120"/>
               </a:rPr>
-              <a:t>Contact: Nishen Madawa Abedeera (CCA5008) | nishenmadawa15@gmail.com</a:t>
+              <a:t>Contact: Nishen Madawa Abedeera (REDACTED) | nishenmadawa15@gmail.com</a:t>
             </a:r>
             <a:endParaRPr lang="en-US" sz="1400" dirty="0"/>
           </a:p>
